--- a/public/fun/pack/pptx/reviewpro/보장점검양식프리미엄_09_부모님점검_로제브론즈.pptx
+++ b/public/fun/pack/pptx/reviewpro/보장점검양식프리미엄_09_부모님점검_로제브론즈.pptx
@@ -112,12 +112,12 @@
   <p:extLst>
     <p:ext uri="{521415D9-36F7-43E2-AB2F-B90AF26B5E84}">
       <p14:sectionLst xmlns:p14="http://schemas.microsoft.com/office/powerpoint/2010/main">
-        <p14:section name="시작" id="{78221D80-802D-4C88-9A6B-ABC06DF0D1B9}">
+        <p14:section name="시작" id="{A6503C3C-B0E1-47A6-8378-0F73020B6E2F}">
           <p14:sldIdLst>
             <p14:sldId id="256"/>
           </p14:sldIdLst>
         </p14:section>
-        <p14:section name="본문" id="{B6914076-35CE-4D40-83DE-61D7884A1BD0}">
+        <p14:section name="본문" id="{7FB4058A-C1C1-43F8-9D55-E4BC6866303E}">
           <p14:sldIdLst>
             <p14:sldId id="257"/>
             <p14:sldId id="258"/>
@@ -2004,7 +2004,7 @@
             </a:lvl1pPr>
           </a:lstStyle>
           <a:p>
-            <a:fld id="{66FE8A18-8EC4-448B-BB4F-76A8310FA328}" type="slidenum">
+            <a:fld id="{43BFD9DC-B378-4EAC-9913-8C7863465E2B}" type="slidenum">
               <a:rPr lang="en-US"/>
               <a:t>‹#›</a:t>
             </a:fld>
@@ -3182,7 +3182,7 @@
             </a:lvl1pPr>
           </a:lstStyle>
           <a:p>
-            <a:fld id="{37CB6FAC-06AF-4038-9599-7B5B43B6D9CE}" type="slidenum">
+            <a:fld id="{A20A4D65-F711-4D33-900D-D54E061DA04E}" type="slidenum">
               <a:rPr lang="en-US"/>
               <a:t>‹#›</a:t>
             </a:fld>
@@ -3935,7 +3935,7 @@
             </a:lvl1pPr>
           </a:lstStyle>
           <a:p>
-            <a:fld id="{2673381E-2061-4586-AC5F-C97C0891B752}" type="slidenum">
+            <a:fld id="{59B130FD-8029-442E-8F55-AA289E708169}" type="slidenum">
               <a:rPr lang="en-US"/>
               <a:t>‹#›</a:t>
             </a:fld>
@@ -4912,7 +4912,7 @@
           <a:p>
             <a:r>
               <a:rPr lang="ko-KR"/>
-              <a:t>부모님 점검 · 0000. 00. 00</a:t>
+              <a:t>부모님 점검 · 날짜 입력</a:t>
             </a:r>
           </a:p>
           <a:p>
@@ -5003,7 +5003,7 @@
           <a:bodyPr/>
           <a:lstStyle/>
           <a:p>
-            <a:fld id="{986C2A6E-EA37-46C9-B0AB-7CB46E8AA225}" type="slidenum">
+            <a:fld id="{E0959618-F1BE-4D88-B104-1FCF62738C39}" type="slidenum">
               <a:rPr lang="en-US"/>
               <a:t>‹#›</a:t>
             </a:fld>
@@ -5716,7 +5716,7 @@
           <a:bodyPr/>
           <a:lstStyle/>
           <a:p>
-            <a:fld id="{3DC8790B-6F46-44B0-9205-4CB31116C4B7}" type="slidenum">
+            <a:fld id="{BB24568F-CE9D-4174-A8CB-28137C587691}" type="slidenum">
               <a:rPr lang="en-US"/>
               <a:t>‹#›</a:t>
             </a:fld>
@@ -7222,7 +7222,7 @@
           <a:bodyPr/>
           <a:lstStyle/>
           <a:p>
-            <a:fld id="{E7878255-568C-4FCF-A38E-915918F09A39}" type="slidenum">
+            <a:fld id="{1048E1C8-BC1B-408C-81F3-3F1D03E75C58}" type="slidenum">
               <a:rPr lang="en-US"/>
               <a:t>‹#›</a:t>
             </a:fld>
@@ -8772,7 +8772,7 @@
           <a:bodyPr/>
           <a:lstStyle/>
           <a:p>
-            <a:fld id="{751B9EDA-F5DB-4AEE-A31E-5769DC75F0B9}" type="slidenum">
+            <a:fld id="{8A95ECC1-5F64-4EB4-91D8-6BC8839EEB5C}" type="slidenum">
               <a:rPr lang="en-US"/>
               <a:t>‹#›</a:t>
             </a:fld>
@@ -9724,7 +9724,7 @@
           <a:bodyPr/>
           <a:lstStyle/>
           <a:p>
-            <a:fld id="{0F7BFE9F-8DA5-4FE6-B64C-FD4CE46583A5}" type="slidenum">
+            <a:fld id="{F73D14BA-7298-45F0-A3D2-1C491900076B}" type="slidenum">
               <a:rPr lang="en-US"/>
               <a:t>‹#›</a:t>
             </a:fld>
